--- a/PUM2/Aktualne/Wykłady/Wyklad2.pptx
+++ b/PUM2/Aktualne/Wykłady/Wyklad2.pptx
@@ -300,7 +300,7 @@
           <a:p>
             <a:fld id="{5113504E-0C99-2340-A5F6-DD6E1A87C372}" type="datetimeFigureOut">
               <a:rPr lang="pl-PL" smtClean="0"/>
-              <a:t>9.10.2026</a:t>
+              <a:t>14.10.2026</a:t>
             </a:fld>
             <a:endParaRPr lang="pl-PL"/>
           </a:p>
@@ -466,7 +466,7 @@
           <a:p>
             <a:fld id="{F78C933E-44E9-2D43-91B0-0D2BEEFA7EB9}" type="datetimeFigureOut">
               <a:rPr lang="pl-PL" smtClean="0"/>
-              <a:t>9.10.2026</a:t>
+              <a:t>14.10.2026</a:t>
             </a:fld>
             <a:endParaRPr lang="pl-PL"/>
           </a:p>
@@ -4105,7 +4105,7 @@
           <a:p>
             <a:fld id="{91017B01-0C30-B241-B19F-621BE4770608}" type="datetimeFigureOut">
               <a:rPr lang="pl-PL" smtClean="0"/>
-              <a:t>9.10.2026</a:t>
+              <a:t>14.10.2026</a:t>
             </a:fld>
             <a:endParaRPr lang="pl-PL"/>
           </a:p>
@@ -4274,7 +4274,7 @@
           <a:p>
             <a:fld id="{91017B01-0C30-B241-B19F-621BE4770608}" type="datetimeFigureOut">
               <a:rPr lang="pl-PL" smtClean="0"/>
-              <a:t>9.10.2026</a:t>
+              <a:t>14.10.2026</a:t>
             </a:fld>
             <a:endParaRPr lang="pl-PL"/>
           </a:p>
@@ -4453,7 +4453,7 @@
           <a:p>
             <a:fld id="{91017B01-0C30-B241-B19F-621BE4770608}" type="datetimeFigureOut">
               <a:rPr lang="pl-PL" smtClean="0"/>
-              <a:t>9.10.2026</a:t>
+              <a:t>14.10.2026</a:t>
             </a:fld>
             <a:endParaRPr lang="pl-PL"/>
           </a:p>
@@ -4622,7 +4622,7 @@
           <a:p>
             <a:fld id="{91017B01-0C30-B241-B19F-621BE4770608}" type="datetimeFigureOut">
               <a:rPr lang="pl-PL" smtClean="0"/>
-              <a:t>9.10.2026</a:t>
+              <a:t>14.10.2026</a:t>
             </a:fld>
             <a:endParaRPr lang="pl-PL"/>
           </a:p>
@@ -4868,7 +4868,7 @@
           <a:p>
             <a:fld id="{91017B01-0C30-B241-B19F-621BE4770608}" type="datetimeFigureOut">
               <a:rPr lang="pl-PL" smtClean="0"/>
-              <a:t>9.10.2026</a:t>
+              <a:t>14.10.2026</a:t>
             </a:fld>
             <a:endParaRPr lang="pl-PL"/>
           </a:p>
@@ -5154,7 +5154,7 @@
           <a:p>
             <a:fld id="{91017B01-0C30-B241-B19F-621BE4770608}" type="datetimeFigureOut">
               <a:rPr lang="pl-PL" smtClean="0"/>
-              <a:t>9.10.2026</a:t>
+              <a:t>14.10.2026</a:t>
             </a:fld>
             <a:endParaRPr lang="pl-PL"/>
           </a:p>
@@ -5574,7 +5574,7 @@
           <a:p>
             <a:fld id="{91017B01-0C30-B241-B19F-621BE4770608}" type="datetimeFigureOut">
               <a:rPr lang="pl-PL" smtClean="0"/>
-              <a:t>9.10.2026</a:t>
+              <a:t>14.10.2026</a:t>
             </a:fld>
             <a:endParaRPr lang="pl-PL"/>
           </a:p>
@@ -5692,7 +5692,7 @@
           <a:p>
             <a:fld id="{91017B01-0C30-B241-B19F-621BE4770608}" type="datetimeFigureOut">
               <a:rPr lang="pl-PL" smtClean="0"/>
-              <a:t>9.10.2026</a:t>
+              <a:t>14.10.2026</a:t>
             </a:fld>
             <a:endParaRPr lang="pl-PL"/>
           </a:p>
@@ -5788,7 +5788,7 @@
           <a:p>
             <a:fld id="{91017B01-0C30-B241-B19F-621BE4770608}" type="datetimeFigureOut">
               <a:rPr lang="pl-PL" smtClean="0"/>
-              <a:t>9.10.2026</a:t>
+              <a:t>14.10.2026</a:t>
             </a:fld>
             <a:endParaRPr lang="pl-PL"/>
           </a:p>
@@ -6065,7 +6065,7 @@
           <a:p>
             <a:fld id="{91017B01-0C30-B241-B19F-621BE4770608}" type="datetimeFigureOut">
               <a:rPr lang="pl-PL" smtClean="0"/>
-              <a:t>9.10.2026</a:t>
+              <a:t>14.10.2026</a:t>
             </a:fld>
             <a:endParaRPr lang="pl-PL"/>
           </a:p>
@@ -6321,7 +6321,7 @@
           <a:p>
             <a:fld id="{91017B01-0C30-B241-B19F-621BE4770608}" type="datetimeFigureOut">
               <a:rPr lang="pl-PL" smtClean="0"/>
-              <a:t>9.10.2026</a:t>
+              <a:t>14.10.2026</a:t>
             </a:fld>
             <a:endParaRPr lang="pl-PL"/>
           </a:p>
@@ -6533,7 +6533,7 @@
           <a:p>
             <a:fld id="{91017B01-0C30-B241-B19F-621BE4770608}" type="datetimeFigureOut">
               <a:rPr lang="pl-PL" smtClean="0"/>
-              <a:t>9.10.2026</a:t>
+              <a:t>14.10.2026</a:t>
             </a:fld>
             <a:endParaRPr lang="pl-PL"/>
           </a:p>
@@ -7848,7 +7848,7 @@
           <p:nvPr>
             <p:extLst>
               <p:ext uri="{D42A27DB-BD31-4B8C-83A1-F6EECF244321}">
-                <p14:modId xmlns:p14="http://schemas.microsoft.com/office/powerpoint/2010/main" val="233164034"/>
+                <p14:modId xmlns:p14="http://schemas.microsoft.com/office/powerpoint/2010/main" val="4075346224"/>
               </p:ext>
             </p:extLst>
           </p:nvPr>
@@ -7965,8 +7965,13 @@
                       </a:r>
                       <a:r>
                         <a:rPr lang="pl-PL" dirty="0"/>
-                        <a:t> korutynę</a:t>
+                        <a:t> w </a:t>
                       </a:r>
+                      <a:r>
+                        <a:rPr lang="pl-PL" dirty="0" err="1"/>
+                        <a:t>korutynie</a:t>
+                      </a:r>
+                      <a:endParaRPr lang="pl-PL" dirty="0"/>
                     </a:p>
                   </a:txBody>
                   <a:tcPr/>
@@ -10788,7 +10793,7 @@
             </a:r>
             <a:r>
               <a:rPr lang="pl-PL" sz="1600" dirty="0"/>
-              <a:t>jest wykonywana bezpośrednio w odpowiedzi na interakcję użytkownika aplikacja (i całe urządzenie) przestaje być </a:t>
+              <a:t>jest wykonywana bezpośrednio w odpowiedzi na interakcję użytkownika aplikacja przestaje być </a:t>
             </a:r>
             <a:r>
               <a:rPr lang="pl-PL" sz="1600" b="1" dirty="0"/>
